--- a/my-task/report-template-ai-agent/템플릿_빈서식.pptx
+++ b/my-task/report-template-ai-agent/템플릿_빈서식.pptx
@@ -9,6 +9,7 @@
     <p:sldId id="257" r:id="rId9"/>
     <p:sldId id="258" r:id="rId10"/>
     <p:sldId id="259" r:id="rId11"/>
+    <p:sldId id="260" r:id="rId12"/>
   </p:sldIdLst>
   <p:sldSz cx="12191695" cy="6858000" type="screen4x3"/>
   <p:notesSz cx="6858000" cy="9144000"/>
@@ -716,6 +717,76 @@
           <a:p>
             <a:r>
               <a:t>발표 스크립트: &lt;가장 큰 리스크 하나 + 하반기에 반드시 넘길 마일스톤 하나로 마무리&gt;</a:t>
+            </a:r>
+          </a:p>
+        </p:txBody>
+      </p:sp>
+      <p:sp>
+        <p:nvSpPr>
+          <p:cNvPr id="4" name="Slide Number Placeholder 3"/>
+          <p:cNvSpPr>
+            <a:spLocks noGrp="1"/>
+          </p:cNvSpPr>
+          <p:nvPr>
+            <p:ph type="sldNum" idx="5" sz="quarter"/>
+          </p:nvPr>
+        </p:nvSpPr>
+        <p:spPr/>
+      </p:sp>
+    </p:spTree>
+  </p:cSld>
+  <p:clrMapOvr>
+    <a:masterClrMapping/>
+  </p:clrMapOvr>
+</p:notes>
+</file>
+
+<file path=ppt/notesSlides/notesSlide5.xml><?xml version="1.0" encoding="utf-8"?>
+<p:notes xmlns:a="http://schemas.openxmlformats.org/drawingml/2006/main" xmlns:p="http://schemas.openxmlformats.org/presentationml/2006/main" xmlns:r="http://schemas.openxmlformats.org/officeDocument/2006/relationships">
+  <p:cSld>
+    <p:spTree>
+      <p:nvGrpSpPr>
+        <p:cNvPr id="1" name=""/>
+        <p:cNvGrpSpPr/>
+        <p:nvPr/>
+      </p:nvGrpSpPr>
+      <p:grpSpPr>
+        <a:xfrm>
+          <a:off x="0" y="0"/>
+          <a:ext cx="0" cy="0"/>
+          <a:chOff x="0" y="0"/>
+          <a:chExt cx="0" cy="0"/>
+        </a:xfrm>
+      </p:grpSpPr>
+      <p:sp>
+        <p:nvSpPr>
+          <p:cNvPr id="2" name="Slide Image Placeholder 1"/>
+          <p:cNvSpPr>
+            <a:spLocks noGrp="1"/>
+          </p:cNvSpPr>
+          <p:nvPr>
+            <p:ph type="sldImg" idx="2"/>
+          </p:nvPr>
+        </p:nvSpPr>
+        <p:spPr/>
+      </p:sp>
+      <p:sp>
+        <p:nvSpPr>
+          <p:cNvPr id="3" name="Notes Placeholder 2"/>
+          <p:cNvSpPr>
+            <a:spLocks noGrp="1"/>
+          </p:cNvSpPr>
+          <p:nvPr>
+            <p:ph type="body" idx="3" sz="quarter"/>
+          </p:nvPr>
+        </p:nvSpPr>
+        <p:spPr/>
+        <p:txBody>
+          <a:bodyPr/>
+          <a:lstStyle/>
+          <a:p>
+            <a:r>
+              <a:t>발표 스크립트: &lt;부록은 발표하지 않고, 질문 나올 때만 펼칩니다. 필요 시 한 줄 안내&gt;</a:t>
             </a:r>
           </a:p>
         </p:txBody>
@@ -4867,6 +4938,65 @@
         <p:spPr>
           <a:xfrm>
             <a:off x="548640" y="2475736"/>
+            <a:ext cx="11185855" cy="332359"/>
+          </a:xfrm>
+          <a:prstGeom prst="rect">
+            <a:avLst/>
+          </a:prstGeom>
+          <a:solidFill>
+            <a:srgbClr val="F7F9FB"/>
+          </a:solidFill>
+          <a:ln w="12700">
+            <a:solidFill>
+              <a:srgbClr val="DCE6F1"/>
+            </a:solidFill>
+          </a:ln>
+        </p:spPr>
+        <p:txBody>
+          <a:bodyPr wrap="square" lIns="109728">
+            <a:spAutoFit/>
+          </a:bodyPr>
+          <a:lstStyle/>
+          <a:p>
+            <a:r>
+              <a:rPr sz="1150" b="0">
+                <a:solidFill>
+                  <a:srgbClr val="334455"/>
+                </a:solidFill>
+                <a:latin typeface="맑은 고딕"/>
+              </a:rPr>
+              <a:t>이행도(%)는 자기평가입니다. </a:t>
+            </a:r>
+            <a:r>
+              <a:rPr sz="1150" b="1">
+                <a:solidFill>
+                  <a:srgbClr val="334455"/>
+                </a:solidFill>
+                <a:latin typeface="맑은 고딕"/>
+              </a:rPr>
+              <a:t>무엇을 100으로 봤는지(모수·단위)</a:t>
+            </a:r>
+            <a:r>
+              <a:rPr sz="1150" b="0">
+                <a:solidFill>
+                  <a:srgbClr val="334455"/>
+                </a:solidFill>
+                <a:latin typeface="맑은 고딕"/>
+              </a:rPr>
+              <a:t>를 미달 사유 칸이나 실적 칸에 한 조각 적어 주세요 — 예: "적용률 = 12개 라인 중 적용 수".</a:t>
+            </a:r>
+          </a:p>
+        </p:txBody>
+      </p:sp>
+      <p:sp>
+        <p:nvSpPr>
+          <p:cNvPr id="7" name="TextBox 6"/>
+          <p:cNvSpPr txBox="1"/>
+          <p:nvPr/>
+        </p:nvSpPr>
+        <p:spPr>
+          <a:xfrm>
+            <a:off x="548640" y="2862959"/>
             <a:ext cx="11185855" cy="344423"/>
           </a:xfrm>
           <a:prstGeom prst="rect">
@@ -4887,7 +5017,7 @@
                 </a:solidFill>
                 <a:latin typeface="맑은 고딕"/>
               </a:rPr>
-              <a:t>총평:</a:t>
+              <a:t>총평 (부서 롤업):</a:t>
             </a:r>
             <a:r>
               <a:rPr sz="1200" b="0">
@@ -4896,7 +5026,7 @@
                 </a:solidFill>
                 <a:latin typeface="맑은 고딕"/>
               </a:rPr>
-              <a:t> &lt;부서 전체 이행을 한 문장으로 — 예: "N개 과제 중 M개 정상 이행, K개 지연"&gt;</a:t>
+              <a:t> &lt;N개 과제 · 🟢 M / 🟡 K / 🔴 L — 한 문장 판단&gt;</a:t>
             </a:r>
           </a:p>
         </p:txBody>
@@ -5216,7 +5346,7 @@
                 </a:solidFill>
                 <a:latin typeface="맑은 고딕"/>
               </a:rPr>
-              <a:t>증거:</a:t>
+              <a:t>증거 (효과):</a:t>
             </a:r>
             <a:r>
               <a:rPr sz="1200" b="0">
@@ -5225,7 +5355,7 @@
                 </a:solidFill>
                 <a:latin typeface="맑은 고딕"/>
               </a:rPr>
-              <a:t> &lt;핵심 지표 전→후 (예: 주 400건 → 0건) / 화면 캡처 / 정성 근거. 미측정이면 &lt;측정 예정&gt;&gt;</a:t>
+              <a:t> &lt;핵심 지표 전→후 + 임원 언어 환산 (예: 주 400건 → 0건 = 주 ○인시 절감). 기밀이면 상대 감소율. 미측정이면 &lt;측정 예정&gt;&gt;</a:t>
             </a:r>
           </a:p>
         </p:txBody>
@@ -5239,6 +5369,58 @@
         <p:spPr>
           <a:xfrm>
             <a:off x="548640" y="2831588"/>
+            <a:ext cx="11185855" cy="344423"/>
+          </a:xfrm>
+          <a:prstGeom prst="rect">
+            <a:avLst/>
+          </a:prstGeom>
+          <a:noFill/>
+        </p:spPr>
+        <p:txBody>
+          <a:bodyPr wrap="square">
+            <a:spAutoFit/>
+          </a:bodyPr>
+          <a:lstStyle/>
+          <a:p>
+            <a:r>
+              <a:rPr sz="1200">
+                <a:solidFill>
+                  <a:srgbClr val="262626"/>
+                </a:solidFill>
+                <a:latin typeface="맑은 고딕"/>
+              </a:rPr>
+              <a:t>• </a:t>
+            </a:r>
+            <a:r>
+              <a:rPr sz="1200" b="1">
+                <a:solidFill>
+                  <a:srgbClr val="262626"/>
+                </a:solidFill>
+                <a:latin typeface="맑은 고딕"/>
+              </a:rPr>
+              <a:t>사용범위 (수용도):</a:t>
+            </a:r>
+            <a:r>
+              <a:rPr sz="1200" b="0">
+                <a:solidFill>
+                  <a:srgbClr val="262626"/>
+                </a:solidFill>
+                <a:latin typeface="맑은 고딕"/>
+              </a:rPr>
+              <a:t> &lt;실사용 범위·빈도·현업 피드백 중 1개 — 예: "3개 라인 적용·주 5회 사용"&gt;</a:t>
+            </a:r>
+          </a:p>
+        </p:txBody>
+      </p:sp>
+      <p:sp>
+        <p:nvSpPr>
+          <p:cNvPr id="10" name="TextBox 9"/>
+          <p:cNvSpPr txBox="1"/>
+          <p:nvPr/>
+        </p:nvSpPr>
+        <p:spPr>
+          <a:xfrm>
+            <a:off x="548640" y="3230875"/>
             <a:ext cx="11185855" cy="344423"/>
           </a:xfrm>
           <a:prstGeom prst="rect">
@@ -5443,6 +5625,15 @@
               </a:rPr>
               <a:t>주요 이슈·리스크</a:t>
             </a:r>
+            <a:r>
+              <a:rPr sz="1200" b="0">
+                <a:solidFill>
+                  <a:srgbClr val="262626"/>
+                </a:solidFill>
+                <a:latin typeface="맑은 고딕"/>
+              </a:rPr>
+              <a:t> (각 항목에 [통제가능] / [외부의존] 태그)</a:t>
+            </a:r>
           </a:p>
         </p:txBody>
       </p:sp>
@@ -5484,7 +5675,7 @@
                 </a:solidFill>
                 <a:latin typeface="맑은 고딕"/>
               </a:rPr>
-              <a:t>&lt;실행상 걸림돌 1 — 예: 데이터 품질, 현장 수용성, 기술 한계&gt;</a:t>
+              <a:t>[통제가능] &lt;우리 부서가 조정 가능한 걸림돌 — 예: 데이터 품질, 재학습&gt;</a:t>
             </a:r>
           </a:p>
         </p:txBody>
@@ -5527,7 +5718,7 @@
                 </a:solidFill>
                 <a:latin typeface="맑은 고딕"/>
               </a:rPr>
-              <a:t>&lt;걸림돌 2&gt;</a:t>
+              <a:t>[외부의존] &lt;타 부서 데이터·인프라·현장 승인 등 외부 요인&gt;</a:t>
             </a:r>
           </a:p>
         </p:txBody>
@@ -5563,6 +5754,15 @@
               </a:rPr>
               <a:t>하반기 중점 방향</a:t>
             </a:r>
+            <a:r>
+              <a:rPr sz="1200" b="0">
+                <a:solidFill>
+                  <a:srgbClr val="262626"/>
+                </a:solidFill>
+                <a:latin typeface="맑은 고딕"/>
+              </a:rPr>
+              <a:t> (대표 1~2개만 마일스톤까지)</a:t>
+            </a:r>
           </a:p>
         </p:txBody>
       </p:sp>
@@ -5604,7 +5804,7 @@
                 </a:solidFill>
                 <a:latin typeface="맑은 고딕"/>
               </a:rPr>
-              <a:t>&lt;로드맵 관점에서 다음 반기 우선순위 1&gt;</a:t>
+              <a:t>&lt;대표 과제&gt;: Q3 &lt;마일스톤&gt; → Q4 &lt;마일스톤&gt; / 완료 기준: &lt;무엇을 보면 됐다고 하나&gt;</a:t>
             </a:r>
           </a:p>
         </p:txBody>
@@ -5647,7 +5847,537 @@
                 </a:solidFill>
                 <a:latin typeface="맑은 고딕"/>
               </a:rPr>
-              <a:t>&lt;우선순위 2&gt;</a:t>
+              <a:t>&lt;나머지 과제는 방향 한 줄&gt;</a:t>
+            </a:r>
+          </a:p>
+        </p:txBody>
+      </p:sp>
+    </p:spTree>
+  </p:cSld>
+  <p:clrMapOvr>
+    <a:masterClrMapping/>
+  </p:clrMapOvr>
+</p:sld>
+</file>
+
+<file path=ppt/slides/slide5.xml><?xml version="1.0" encoding="utf-8"?>
+<p:sld xmlns:a="http://schemas.openxmlformats.org/drawingml/2006/main" xmlns:p="http://schemas.openxmlformats.org/presentationml/2006/main" xmlns:r="http://schemas.openxmlformats.org/officeDocument/2006/relationships">
+  <p:cSld>
+    <p:spTree>
+      <p:nvGrpSpPr>
+        <p:cNvPr id="1" name=""/>
+        <p:cNvGrpSpPr/>
+        <p:nvPr/>
+      </p:nvGrpSpPr>
+      <p:grpSpPr/>
+      <p:sp>
+        <p:nvSpPr>
+          <p:cNvPr id="2" name="Rectangle 1"/>
+          <p:cNvSpPr/>
+          <p:nvPr/>
+        </p:nvSpPr>
+        <p:spPr>
+          <a:xfrm>
+            <a:off x="0" y="0"/>
+            <a:ext cx="12191695" cy="109728"/>
+          </a:xfrm>
+          <a:prstGeom prst="rect">
+            <a:avLst/>
+          </a:prstGeom>
+          <a:solidFill>
+            <a:srgbClr val="1F497D"/>
+          </a:solidFill>
+          <a:ln>
+            <a:noFill/>
+          </a:ln>
+        </p:spPr>
+        <p:style>
+          <a:lnRef idx="1">
+            <a:schemeClr val="accent1"/>
+          </a:lnRef>
+          <a:fillRef idx="3">
+            <a:schemeClr val="accent1"/>
+          </a:fillRef>
+          <a:effectRef idx="2">
+            <a:schemeClr val="accent1"/>
+          </a:effectRef>
+          <a:fontRef idx="minor">
+            <a:schemeClr val="lt1"/>
+          </a:fontRef>
+        </p:style>
+        <p:txBody>
+          <a:bodyPr rtlCol="0" anchor="ctr"/>
+          <a:lstStyle/>
+          <a:p>
+            <a:pPr algn="ctr"/>
+          </a:p>
+        </p:txBody>
+      </p:sp>
+      <p:sp>
+        <p:nvSpPr>
+          <p:cNvPr id="3" name="TextBox 2"/>
+          <p:cNvSpPr txBox="1"/>
+          <p:nvPr/>
+        </p:nvSpPr>
+        <p:spPr>
+          <a:xfrm>
+            <a:off x="502920" y="292608"/>
+            <a:ext cx="10271455" cy="868680"/>
+          </a:xfrm>
+          <a:prstGeom prst="rect">
+            <a:avLst/>
+          </a:prstGeom>
+          <a:noFill/>
+        </p:spPr>
+        <p:txBody>
+          <a:bodyPr wrap="square">
+            <a:spAutoFit/>
+          </a:bodyPr>
+          <a:lstStyle/>
+          <a:p>
+            <a:r>
+              <a:rPr sz="2400" b="1">
+                <a:solidFill>
+                  <a:srgbClr val="1F497D"/>
+                </a:solidFill>
+                <a:latin typeface="맑은 고딕"/>
+              </a:rPr>
+              <a:t>부록 (부서 재량)</a:t>
+            </a:r>
+          </a:p>
+        </p:txBody>
+      </p:sp>
+      <p:sp>
+        <p:nvSpPr>
+          <p:cNvPr id="4" name="TextBox 3"/>
+          <p:cNvSpPr txBox="1"/>
+          <p:nvPr/>
+        </p:nvSpPr>
+        <p:spPr>
+          <a:xfrm>
+            <a:off x="11185855" y="320040"/>
+            <a:ext cx="731520" cy="457200"/>
+          </a:xfrm>
+          <a:prstGeom prst="rect">
+            <a:avLst/>
+          </a:prstGeom>
+          <a:noFill/>
+        </p:spPr>
+        <p:txBody>
+          <a:bodyPr wrap="none">
+            <a:spAutoFit/>
+          </a:bodyPr>
+          <a:lstStyle/>
+          <a:p>
+            <a:pPr algn="r"/>
+            <a:r>
+              <a:rPr sz="1400">
+                <a:solidFill>
+                  <a:srgbClr val="595959"/>
+                </a:solidFill>
+                <a:latin typeface="맑은 고딕"/>
+              </a:rPr>
+              <a:t>5</a:t>
+            </a:r>
+          </a:p>
+        </p:txBody>
+      </p:sp>
+      <p:sp>
+        <p:nvSpPr>
+          <p:cNvPr id="5" name="TextBox 4"/>
+          <p:cNvSpPr txBox="1"/>
+          <p:nvPr/>
+        </p:nvSpPr>
+        <p:spPr>
+          <a:xfrm>
+            <a:off x="548640" y="1234440"/>
+            <a:ext cx="11185855" cy="332359"/>
+          </a:xfrm>
+          <a:prstGeom prst="rect">
+            <a:avLst/>
+          </a:prstGeom>
+          <a:solidFill>
+            <a:srgbClr val="F7F9FB"/>
+          </a:solidFill>
+          <a:ln w="12700">
+            <a:solidFill>
+              <a:srgbClr val="DCE6F1"/>
+            </a:solidFill>
+          </a:ln>
+        </p:spPr>
+        <p:txBody>
+          <a:bodyPr wrap="square" lIns="109728">
+            <a:spAutoFit/>
+          </a:bodyPr>
+          <a:lstStyle/>
+          <a:p>
+            <a:r>
+              <a:rPr sz="1150" b="0">
+                <a:solidFill>
+                  <a:srgbClr val="334455"/>
+                </a:solidFill>
+                <a:latin typeface="맑은 고딕"/>
+              </a:rPr>
+              <a:t>ⓘ 부록은 </a:t>
+            </a:r>
+            <a:r>
+              <a:rPr sz="1150" b="1">
+                <a:solidFill>
+                  <a:srgbClr val="334455"/>
+                </a:solidFill>
+                <a:latin typeface="맑은 고딕"/>
+              </a:rPr>
+              <a:t>부서 재량 공간</a:t>
+            </a:r>
+            <a:r>
+              <a:rPr sz="1150" b="0">
+                <a:solidFill>
+                  <a:srgbClr val="334455"/>
+                </a:solidFill>
+                <a:latin typeface="맑은 고딕"/>
+              </a:rPr>
+              <a:t>입니다. 아래 두 용도로 쓰고, 넣을 게 없으면 이 장 전체를 삭제하세요. 장 수가 늘면 부록 장을 여러 개로 쪼개도 됩니다(장표 5, 6 …).</a:t>
+            </a:r>
+          </a:p>
+        </p:txBody>
+      </p:sp>
+      <p:sp>
+        <p:nvSpPr>
+          <p:cNvPr id="6" name="TextBox 5"/>
+          <p:cNvSpPr txBox="1"/>
+          <p:nvPr/>
+        </p:nvSpPr>
+        <p:spPr>
+          <a:xfrm>
+            <a:off x="548640" y="1621663"/>
+            <a:ext cx="11185855" cy="344423"/>
+          </a:xfrm>
+          <a:prstGeom prst="rect">
+            <a:avLst/>
+          </a:prstGeom>
+          <a:noFill/>
+        </p:spPr>
+        <p:txBody>
+          <a:bodyPr wrap="square">
+            <a:spAutoFit/>
+          </a:bodyPr>
+          <a:lstStyle/>
+          <a:p>
+            <a:r>
+              <a:rPr sz="1200" b="1">
+                <a:solidFill>
+                  <a:srgbClr val="262626"/>
+                </a:solidFill>
+                <a:latin typeface="맑은 고딕"/>
+              </a:rPr>
+              <a:t>(1) 로드맵 수정 사항</a:t>
+            </a:r>
+            <a:r>
+              <a:rPr sz="1200" b="0">
+                <a:solidFill>
+                  <a:srgbClr val="262626"/>
+                </a:solidFill>
+                <a:latin typeface="맑은 고딕"/>
+              </a:rPr>
+              <a:t> — 상반기 로드맵을 실제로 고쳐야 하는 변경이 있을 때만.</a:t>
+            </a:r>
+          </a:p>
+        </p:txBody>
+      </p:sp>
+      <p:graphicFrame>
+        <p:nvGraphicFramePr>
+          <p:cNvPr id="7" name="Table 6"/>
+          <p:cNvGraphicFramePr>
+            <a:graphicFrameLocks noGrp="1"/>
+          </p:cNvGraphicFramePr>
+          <p:nvPr/>
+        </p:nvGraphicFramePr>
+        <p:xfrm>
+          <a:off x="502920" y="2020950"/>
+          <a:ext cx="11185854" cy="565784"/>
+        </p:xfrm>
+        <a:graphic>
+          <a:graphicData uri="http://schemas.openxmlformats.org/drawingml/2006/table">
+            <a:tbl>
+              <a:tblPr firstRow="1" bandRow="1">
+                <a:tableStyleId>{5C22544A-7EE6-4342-B048-85BDC9FD1C3A}</a:tableStyleId>
+              </a:tblPr>
+              <a:tblGrid>
+                <a:gridCol w="3728618"/>
+                <a:gridCol w="3728618"/>
+                <a:gridCol w="3728618"/>
+              </a:tblGrid>
+              <a:tr h="282892">
+                <a:tc>
+                  <a:txBody>
+                    <a:bodyPr wrap="square"/>
+                    <a:lstStyle/>
+                    <a:p>
+                      <a:pPr algn="l"/>
+                      <a:r>
+                        <a:rPr sz="1100" b="1">
+                          <a:solidFill>
+                            <a:srgbClr val="1F497D"/>
+                          </a:solidFill>
+                          <a:latin typeface="맑은 고딕"/>
+                        </a:rPr>
+                        <a:t>변경 항목</a:t>
+                      </a:r>
+                    </a:p>
+                  </a:txBody>
+                  <a:tcPr marL="54864" marR="54864" marT="18288" marB="18288" anchor="ctr">
+                    <a:solidFill>
+                      <a:srgbClr val="DCE6F1"/>
+                    </a:solidFill>
+                  </a:tcPr>
+                </a:tc>
+                <a:tc>
+                  <a:txBody>
+                    <a:bodyPr wrap="square"/>
+                    <a:lstStyle/>
+                    <a:p>
+                      <a:pPr algn="l"/>
+                      <a:r>
+                        <a:rPr sz="1100" b="1">
+                          <a:solidFill>
+                            <a:srgbClr val="1F497D"/>
+                          </a:solidFill>
+                          <a:latin typeface="맑은 고딕"/>
+                        </a:rPr>
+                        <a:t>변경 전 → 후</a:t>
+                      </a:r>
+                    </a:p>
+                  </a:txBody>
+                  <a:tcPr marL="54864" marR="54864" marT="18288" marB="18288" anchor="ctr">
+                    <a:solidFill>
+                      <a:srgbClr val="DCE6F1"/>
+                    </a:solidFill>
+                  </a:tcPr>
+                </a:tc>
+                <a:tc>
+                  <a:txBody>
+                    <a:bodyPr wrap="square"/>
+                    <a:lstStyle/>
+                    <a:p>
+                      <a:pPr algn="l"/>
+                      <a:r>
+                        <a:rPr sz="1100" b="1">
+                          <a:solidFill>
+                            <a:srgbClr val="1F497D"/>
+                          </a:solidFill>
+                          <a:latin typeface="맑은 고딕"/>
+                        </a:rPr>
+                        <a:t>사유</a:t>
+                      </a:r>
+                    </a:p>
+                  </a:txBody>
+                  <a:tcPr marL="54864" marR="54864" marT="18288" marB="18288" anchor="ctr">
+                    <a:solidFill>
+                      <a:srgbClr val="DCE6F1"/>
+                    </a:solidFill>
+                  </a:tcPr>
+                </a:tc>
+              </a:tr>
+              <a:tr h="282892">
+                <a:tc>
+                  <a:txBody>
+                    <a:bodyPr wrap="square"/>
+                    <a:lstStyle/>
+                    <a:p>
+                      <a:pPr algn="l"/>
+                      <a:r>
+                        <a:rPr sz="1050" b="0">
+                          <a:solidFill>
+                            <a:srgbClr val="262626"/>
+                          </a:solidFill>
+                          <a:latin typeface="맑은 고딕"/>
+                        </a:rPr>
+                        <a:t>&lt;과제/목표/일정&gt;</a:t>
+                      </a:r>
+                    </a:p>
+                  </a:txBody>
+                  <a:tcPr marL="54864" marR="54864" marT="18288" marB="18288" anchor="ctr">
+                    <a:solidFill>
+                      <a:srgbClr val="FFFFFF"/>
+                    </a:solidFill>
+                  </a:tcPr>
+                </a:tc>
+                <a:tc>
+                  <a:txBody>
+                    <a:bodyPr wrap="square"/>
+                    <a:lstStyle/>
+                    <a:p>
+                      <a:pPr algn="l"/>
+                      <a:r>
+                        <a:rPr sz="1050" b="0">
+                          <a:solidFill>
+                            <a:srgbClr val="262626"/>
+                          </a:solidFill>
+                          <a:latin typeface="맑은 고딕"/>
+                        </a:rPr>
+                        <a:t>&lt;기존 → 변경&gt;</a:t>
+                      </a:r>
+                    </a:p>
+                  </a:txBody>
+                  <a:tcPr marL="54864" marR="54864" marT="18288" marB="18288" anchor="ctr">
+                    <a:solidFill>
+                      <a:srgbClr val="FFFFFF"/>
+                    </a:solidFill>
+                  </a:tcPr>
+                </a:tc>
+                <a:tc>
+                  <a:txBody>
+                    <a:bodyPr wrap="square"/>
+                    <a:lstStyle/>
+                    <a:p>
+                      <a:pPr algn="l"/>
+                      <a:r>
+                        <a:rPr sz="1050" b="0">
+                          <a:solidFill>
+                            <a:srgbClr val="262626"/>
+                          </a:solidFill>
+                          <a:latin typeface="맑은 고딕"/>
+                        </a:rPr>
+                        <a:t>&lt;왜 바꾸나 한 줄&gt;</a:t>
+                      </a:r>
+                    </a:p>
+                  </a:txBody>
+                  <a:tcPr marL="54864" marR="54864" marT="18288" marB="18288" anchor="ctr">
+                    <a:solidFill>
+                      <a:srgbClr val="FFFFFF"/>
+                    </a:solidFill>
+                  </a:tcPr>
+                </a:tc>
+              </a:tr>
+            </a:tbl>
+          </a:graphicData>
+        </a:graphic>
+      </p:graphicFrame>
+      <p:sp>
+        <p:nvSpPr>
+          <p:cNvPr id="8" name="TextBox 7"/>
+          <p:cNvSpPr txBox="1"/>
+          <p:nvPr/>
+        </p:nvSpPr>
+        <p:spPr>
+          <a:xfrm>
+            <a:off x="548640" y="2696462"/>
+            <a:ext cx="11185855" cy="344423"/>
+          </a:xfrm>
+          <a:prstGeom prst="rect">
+            <a:avLst/>
+          </a:prstGeom>
+          <a:noFill/>
+        </p:spPr>
+        <p:txBody>
+          <a:bodyPr wrap="square">
+            <a:spAutoFit/>
+          </a:bodyPr>
+          <a:lstStyle/>
+          <a:p>
+            <a:r>
+              <a:rPr sz="1200" b="1">
+                <a:solidFill>
+                  <a:srgbClr val="262626"/>
+                </a:solidFill>
+                <a:latin typeface="맑은 고딕"/>
+              </a:rPr>
+              <a:t>(2) 그 밖의 보강 자료</a:t>
+            </a:r>
+            <a:r>
+              <a:rPr sz="1200" b="0">
+                <a:solidFill>
+                  <a:srgbClr val="262626"/>
+                </a:solidFill>
+                <a:latin typeface="맑은 고딕"/>
+              </a:rPr>
+              <a:t> — 본문(1~4장)에 다 못 담은 근거를 부서가 자유롭게 추가.</a:t>
+            </a:r>
+          </a:p>
+        </p:txBody>
+      </p:sp>
+      <p:sp>
+        <p:nvSpPr>
+          <p:cNvPr id="9" name="TextBox 8"/>
+          <p:cNvSpPr txBox="1"/>
+          <p:nvPr/>
+        </p:nvSpPr>
+        <p:spPr>
+          <a:xfrm>
+            <a:off x="548640" y="3095749"/>
+            <a:ext cx="11185855" cy="344423"/>
+          </a:xfrm>
+          <a:prstGeom prst="rect">
+            <a:avLst/>
+          </a:prstGeom>
+          <a:noFill/>
+        </p:spPr>
+        <p:txBody>
+          <a:bodyPr wrap="square">
+            <a:spAutoFit/>
+          </a:bodyPr>
+          <a:lstStyle/>
+          <a:p>
+            <a:r>
+              <a:rPr sz="1200">
+                <a:solidFill>
+                  <a:srgbClr val="262626"/>
+                </a:solidFill>
+                <a:latin typeface="맑은 고딕"/>
+              </a:rPr>
+              <a:t>• </a:t>
+            </a:r>
+            <a:r>
+              <a:rPr sz="1200" b="0">
+                <a:solidFill>
+                  <a:srgbClr val="262626"/>
+                </a:solidFill>
+                <a:latin typeface="맑은 고딕"/>
+              </a:rPr>
+              <a:t>&lt;상세 지표·추가 화면 캡처·백업 데이터·용어 설명 등 필요한 것&gt;</a:t>
+            </a:r>
+          </a:p>
+        </p:txBody>
+      </p:sp>
+      <p:sp>
+        <p:nvSpPr>
+          <p:cNvPr id="10" name="TextBox 9"/>
+          <p:cNvSpPr txBox="1"/>
+          <p:nvPr/>
+        </p:nvSpPr>
+        <p:spPr>
+          <a:xfrm>
+            <a:off x="548640" y="3495036"/>
+            <a:ext cx="11185855" cy="344423"/>
+          </a:xfrm>
+          <a:prstGeom prst="rect">
+            <a:avLst/>
+          </a:prstGeom>
+          <a:noFill/>
+        </p:spPr>
+        <p:txBody>
+          <a:bodyPr wrap="square">
+            <a:spAutoFit/>
+          </a:bodyPr>
+          <a:lstStyle/>
+          <a:p>
+            <a:r>
+              <a:rPr sz="1200">
+                <a:solidFill>
+                  <a:srgbClr val="262626"/>
+                </a:solidFill>
+                <a:latin typeface="맑은 고딕"/>
+              </a:rPr>
+              <a:t>• </a:t>
+            </a:r>
+            <a:r>
+              <a:rPr sz="1200" b="0">
+                <a:solidFill>
+                  <a:srgbClr val="262626"/>
+                </a:solidFill>
+                <a:latin typeface="맑은 고딕"/>
+              </a:rPr>
+              <a:t>&lt;ITC장 예상 질문에 대비한 근거 한두 개&gt;</a:t>
             </a:r>
           </a:p>
         </p:txBody>

--- a/my-task/report-template-ai-agent/템플릿_빈서식.pptx
+++ b/my-task/report-template-ai-agent/템플릿_빈서식.pptx
@@ -4155,7 +4155,7 @@
                           </a:solidFill>
                           <a:latin typeface="맑은 고딕"/>
                         </a:rPr>
-                        <a:t>2026 상반기 로드맵 이행 현황</a:t>
+                        <a:t>2026 상반기 로드맵 이행 실적 · 하반기 추진 계획</a:t>
                       </a:r>
                     </a:p>
                   </a:txBody>
@@ -4310,7 +4310,7 @@
         </p:nvGraphicFramePr>
         <p:xfrm>
           <a:off x="502920" y="1234440"/>
-          <a:ext cx="11185853" cy="1131568"/>
+          <a:ext cx="11185853" cy="1338261"/>
         </p:xfrm>
         <a:graphic>
           <a:graphicData uri="http://schemas.openxmlformats.org/drawingml/2006/table">
@@ -4479,7 +4479,7 @@
                           </a:solidFill>
                           <a:latin typeface="맑은 고딕"/>
                         </a:rPr>
-                        <a:t>하반기 방향</a:t>
+                        <a:t>하반기 목표 (H2 기준선)</a:t>
                       </a:r>
                     </a:p>
                   </a:txBody>
@@ -4490,7 +4490,7 @@
                   </a:tcPr>
                 </a:tc>
               </a:tr>
-              <a:tr h="282892">
+              <a:tr h="489585">
                 <a:tc>
                   <a:txBody>
                     <a:bodyPr wrap="square"/>
@@ -4642,7 +4642,7 @@
                           </a:solidFill>
                           <a:latin typeface="맑은 고딕"/>
                         </a:rPr>
-                        <a:t>&lt;다음 반기 방향 한 줄&gt;</a:t>
+                        <a:t>&lt;H2에 달성할 목표 — 측정 가능한 한 줄&gt;</a:t>
                       </a:r>
                     </a:p>
                   </a:txBody>
@@ -4805,7 +4805,7 @@
                           </a:solidFill>
                           <a:latin typeface="맑은 고딕"/>
                         </a:rPr>
-                        <a:t>&lt;방향 한 줄&gt;</a:t>
+                        <a:t>&lt;H2 목표 한 줄&gt;</a:t>
                       </a:r>
                     </a:p>
                   </a:txBody>
@@ -4937,8 +4937,8 @@
         </p:nvSpPr>
         <p:spPr>
           <a:xfrm>
-            <a:off x="548640" y="2475736"/>
-            <a:ext cx="11185855" cy="332359"/>
+            <a:off x="548640" y="2682429"/>
+            <a:ext cx="11185855" cy="887349"/>
           </a:xfrm>
           <a:prstGeom prst="rect">
             <a:avLst/>
@@ -4986,6 +4986,64 @@
               <a:t>를 미달 사유 칸이나 실적 칸에 한 조각 적어 주세요 — 예: "적용률 = 12개 라인 중 적용 수".</a:t>
             </a:r>
           </a:p>
+          <a:p>
+            <a:r>
+              <a:rPr sz="1150" b="0">
+                <a:solidFill>
+                  <a:srgbClr val="334455"/>
+                </a:solidFill>
+                <a:latin typeface="맑은 고딕"/>
+              </a:rPr>
+              <a:t>과제명은 </a:t>
+            </a:r>
+            <a:r>
+              <a:rPr sz="1150" b="1">
+                <a:solidFill>
+                  <a:srgbClr val="334455"/>
+                </a:solidFill>
+                <a:latin typeface="맑은 고딕"/>
+              </a:rPr>
+              <a:t>상반기 로드맵에 올린 이름 그대로</a:t>
+            </a:r>
+            <a:r>
+              <a:rPr sz="1150" b="0">
+                <a:solidFill>
+                  <a:srgbClr val="334455"/>
+                </a:solidFill>
+                <a:latin typeface="맑은 고딕"/>
+              </a:rPr>
+              <a:t> 씁니다 (로드맵 과제 ID가 있으면 병기) — 로드맵과 대조해 보시기 때문입니다.</a:t>
+            </a:r>
+          </a:p>
+          <a:p>
+            <a:r>
+              <a:rPr sz="1150" b="0">
+                <a:solidFill>
+                  <a:srgbClr val="334455"/>
+                </a:solidFill>
+                <a:latin typeface="맑은 고딕"/>
+              </a:rPr>
+              <a:t>"하반기 목표"는 방향이 아니라 </a:t>
+            </a:r>
+            <a:r>
+              <a:rPr sz="1150" b="1">
+                <a:solidFill>
+                  <a:srgbClr val="334455"/>
+                </a:solidFill>
+                <a:latin typeface="맑은 고딕"/>
+              </a:rPr>
+              <a:t>목표</a:t>
+            </a:r>
+            <a:r>
+              <a:rPr sz="1150" b="0">
+                <a:solidFill>
+                  <a:srgbClr val="334455"/>
+                </a:solidFill>
+                <a:latin typeface="맑은 고딕"/>
+              </a:rPr>
+              <a:t>입니다 — 이 칸이 연말 리뷰에서 "H2 계획" 칸이 됩니다. 측정 가능하게 적으세요.</a:t>
+            </a:r>
+          </a:p>
         </p:txBody>
       </p:sp>
       <p:sp>
@@ -4996,7 +5054,7 @@
         </p:nvSpPr>
         <p:spPr>
           <a:xfrm>
-            <a:off x="548640" y="2862959"/>
+            <a:off x="548640" y="3624642"/>
             <a:ext cx="11185855" cy="344423"/>
           </a:xfrm>
           <a:prstGeom prst="rect">
@@ -5718,7 +5776,7 @@
                 </a:solidFill>
                 <a:latin typeface="맑은 고딕"/>
               </a:rPr>
-              <a:t>[외부의존] &lt;타 부서 데이터·인프라·현장 승인 등 외부 요인&gt;</a:t>
+              <a:t>[외부의존] &lt;타 부서 데이터·공통 인프라(LLM 서빙 등)·현장 승인 등 외부 요인&gt;</a:t>
             </a:r>
           </a:p>
         </p:txBody>
@@ -5761,7 +5819,7 @@
                 </a:solidFill>
                 <a:latin typeface="맑은 고딕"/>
               </a:rPr>
-              <a:t> (대표 1~2개만 마일스톤까지)</a:t>
+              <a:t> (대표 1~2개만 마일스톤까지 — 과제별 H2 목표는 장표 2 마지막 컬럼이 기준선)</a:t>
             </a:r>
           </a:p>
         </p:txBody>
@@ -5847,7 +5905,7 @@
                 </a:solidFill>
                 <a:latin typeface="맑은 고딕"/>
               </a:rPr>
-              <a:t>&lt;나머지 과제는 방향 한 줄&gt;</a:t>
+              <a:t>&lt;나머지 과제는 장표 2의 H2 목표로 갈음, 특이사항만 한 줄&gt;</a:t>
             </a:r>
           </a:p>
         </p:txBody>
